--- a/Optimizing HttpClient.pptx
+++ b/Optimizing HttpClient.pptx
@@ -1318,7 +1318,7 @@
           <a:p>
             <a:fld id="{1FC1E5DE-E753-4C45-BD36-C08B1596C91C}" type="datetimeFigureOut">
               <a:rPr lang="en-BE" smtClean="0"/>
-              <a:t>04/12/2025</a:t>
+              <a:t>29/01/2026</a:t>
             </a:fld>
             <a:endParaRPr lang="en-BE"/>
           </a:p>
@@ -3416,7 +3416,7 @@
           <a:p>
             <a:fld id="{B6FBA6FE-56B9-4991-89E1-1E32801D2C3E}" type="datetimeFigureOut">
               <a:rPr lang="en-BE" smtClean="0"/>
-              <a:t>04/12/2025</a:t>
+              <a:t>29/01/2026</a:t>
             </a:fld>
             <a:endParaRPr lang="en-BE"/>
           </a:p>
@@ -3668,7 +3668,7 @@
           <a:p>
             <a:fld id="{B6FBA6FE-56B9-4991-89E1-1E32801D2C3E}" type="datetimeFigureOut">
               <a:rPr lang="en-BE" smtClean="0"/>
-              <a:t>04/12/2025</a:t>
+              <a:t>29/01/2026</a:t>
             </a:fld>
             <a:endParaRPr lang="en-BE"/>
           </a:p>
@@ -3930,7 +3930,7 @@
           <a:p>
             <a:fld id="{B6FBA6FE-56B9-4991-89E1-1E32801D2C3E}" type="datetimeFigureOut">
               <a:rPr lang="en-BE" smtClean="0"/>
-              <a:t>04/12/2025</a:t>
+              <a:t>29/01/2026</a:t>
             </a:fld>
             <a:endParaRPr lang="en-BE"/>
           </a:p>
@@ -4186,7 +4186,7 @@
           <a:p>
             <a:fld id="{B6FBA6FE-56B9-4991-89E1-1E32801D2C3E}" type="datetimeFigureOut">
               <a:rPr lang="en-BE" smtClean="0"/>
-              <a:t>04/12/2025</a:t>
+              <a:t>29/01/2026</a:t>
             </a:fld>
             <a:endParaRPr lang="en-BE"/>
           </a:p>
@@ -4472,7 +4472,7 @@
           <a:p>
             <a:fld id="{B6FBA6FE-56B9-4991-89E1-1E32801D2C3E}" type="datetimeFigureOut">
               <a:rPr lang="en-BE" smtClean="0"/>
-              <a:t>04/12/2025</a:t>
+              <a:t>29/01/2026</a:t>
             </a:fld>
             <a:endParaRPr lang="en-BE"/>
           </a:p>
@@ -4828,7 +4828,7 @@
           <a:p>
             <a:fld id="{B6FBA6FE-56B9-4991-89E1-1E32801D2C3E}" type="datetimeFigureOut">
               <a:rPr lang="en-BE" smtClean="0"/>
-              <a:t>04/12/2025</a:t>
+              <a:t>29/01/2026</a:t>
             </a:fld>
             <a:endParaRPr lang="en-BE"/>
           </a:p>
@@ -5339,7 +5339,7 @@
           <a:p>
             <a:fld id="{B6FBA6FE-56B9-4991-89E1-1E32801D2C3E}" type="datetimeFigureOut">
               <a:rPr lang="en-BE" smtClean="0"/>
-              <a:t>04/12/2025</a:t>
+              <a:t>29/01/2026</a:t>
             </a:fld>
             <a:endParaRPr lang="en-BE"/>
           </a:p>
@@ -5497,7 +5497,7 @@
           <a:p>
             <a:fld id="{B6FBA6FE-56B9-4991-89E1-1E32801D2C3E}" type="datetimeFigureOut">
               <a:rPr lang="en-BE" smtClean="0"/>
-              <a:t>04/12/2025</a:t>
+              <a:t>29/01/2026</a:t>
             </a:fld>
             <a:endParaRPr lang="en-BE"/>
           </a:p>
@@ -5618,7 +5618,7 @@
           <a:p>
             <a:fld id="{B6FBA6FE-56B9-4991-89E1-1E32801D2C3E}" type="datetimeFigureOut">
               <a:rPr lang="en-BE" smtClean="0"/>
-              <a:t>04/12/2025</a:t>
+              <a:t>29/01/2026</a:t>
             </a:fld>
             <a:endParaRPr lang="en-BE"/>
           </a:p>
@@ -5967,7 +5967,7 @@
           <a:p>
             <a:fld id="{B6FBA6FE-56B9-4991-89E1-1E32801D2C3E}" type="datetimeFigureOut">
               <a:rPr lang="en-BE" smtClean="0"/>
-              <a:t>04/12/2025</a:t>
+              <a:t>29/01/2026</a:t>
             </a:fld>
             <a:endParaRPr lang="en-BE"/>
           </a:p>
@@ -6272,7 +6272,7 @@
           <a:p>
             <a:fld id="{B6FBA6FE-56B9-4991-89E1-1E32801D2C3E}" type="datetimeFigureOut">
               <a:rPr lang="en-BE" smtClean="0"/>
-              <a:t>04/12/2025</a:t>
+              <a:t>29/01/2026</a:t>
             </a:fld>
             <a:endParaRPr lang="en-BE"/>
           </a:p>
@@ -6515,7 +6515,7 @@
           <a:p>
             <a:fld id="{B6FBA6FE-56B9-4991-89E1-1E32801D2C3E}" type="datetimeFigureOut">
               <a:rPr lang="en-BE" smtClean="0"/>
-              <a:t>04/12/2025</a:t>
+              <a:t>29/01/2026</a:t>
             </a:fld>
             <a:endParaRPr lang="en-BE"/>
           </a:p>
@@ -9504,7 +9504,7 @@
         </p:spPr>
         <p:txBody>
           <a:bodyPr>
-            <a:normAutofit fontScale="92500" lnSpcReduction="20000"/>
+            <a:normAutofit fontScale="92500" lnSpcReduction="10000"/>
           </a:bodyPr>
           <a:lstStyle/>
           <a:p>
@@ -9515,15 +9515,7 @@
             </a:pPr>
             <a:r>
               <a:rPr lang="en-US" dirty="0"/>
-              <a:t>Senior Application Architect @ </a:t>
-            </a:r>
-            <a:r>
-              <a:rPr lang="en-US" dirty="0" err="1"/>
-              <a:t>Inetum</a:t>
-            </a:r>
-            <a:r>
-              <a:rPr lang="en-US" dirty="0"/>
-              <a:t> Belgium</a:t>
+              <a:t>Cloud Solution Architect @ Microsoft</a:t>
             </a:r>
           </a:p>
           <a:p>
@@ -9534,7 +9526,7 @@
             </a:pPr>
             <a:r>
               <a:rPr lang="en-US" dirty="0"/>
-              <a:t>Microsoft MVP Dev Tech since 2014</a:t>
+              <a:t>Former Microsoft MVP Dev Tech 2013 - 2025</a:t>
             </a:r>
           </a:p>
           <a:p>
@@ -9560,18 +9552,11 @@
             </a:r>
             <a:r>
               <a:rPr lang="en-US" dirty="0"/>
-              <a:t> BE / NL crew</a:t>
-            </a:r>
-          </a:p>
-          <a:p>
-            <a:pPr>
-              <a:lnSpc>
-                <a:spcPct val="100000"/>
-              </a:lnSpc>
-            </a:pPr>
-            <a:r>
-              <a:rPr lang="en-US" dirty="0"/>
-              <a:t>Author</a:t>
+              <a:t> BE / </a:t>
+            </a:r>
+            <a:r>
+              <a:rPr lang="en-US"/>
+              <a:t>NL crew</a:t>
             </a:r>
             <a:br>
               <a:rPr lang="en-US" dirty="0"/>
